--- a/大轉向資產配置策略_final.pptx
+++ b/大轉向資產配置策略_final.pptx
@@ -3171,7 +3171,7 @@
               </a:defRPr>
             </a:pPr>
             <a:r>
-              <a:t>USD/TWD 31.63  ×  台股 46,185（09/11 收盤）  ×  10yr 4.97%</a:t>
+              <a:t>USD/TWD 31.82  ×  台股 45,511（09/15 收盤）  ×  10yr 5.00%</a:t>
             </a:r>
           </a:p>
         </p:txBody>
@@ -3209,7 +3209,7 @@
               </a:defRPr>
             </a:pPr>
             <a:r>
-              <a:t>數據基準：09/11 最新收盤（執行時自動抓取）｜ 龍九控股策略框架 9/6 核准</a:t>
+              <a:t>數據基準：09/15 最新收盤（執行時自動抓取）｜ 龍九控股策略框架 9/6 核准</a:t>
             </a:r>
           </a:p>
           <a:p>
@@ -3370,7 +3370,7 @@
               </a:defRPr>
             </a:pPr>
             <a:r>
-              <a:t>1️⃣ 【您】9/11 申購貝萊德B11 500萬（未質押）→ 過戶後整池質押 540 萬@2.77%</a:t>
+              <a:t>1️⃣ 【您】整池 1,200萬×4.5成 = 540萬@2.77%質押（尚未撥款（對保完成後約 2 週，預估 2026-09-25））</a:t>
             </a:r>
           </a:p>
           <a:p>
@@ -3744,7 +3744,7 @@
               </a:defRPr>
             </a:pPr>
             <a:r>
-              <a:t>💰 匯率 31.63：台幣偏強 → 不再加碼美元曝險，等 10 月重評估</a:t>
+              <a:t>💰 匯率 31.82：台幣偏強 → 不再加碼美元曝險，等 10 月重評估</a:t>
             </a:r>
           </a:p>
           <a:p>
@@ -3798,34 +3798,34 @@
               </a:defRPr>
             </a:pPr>
             <a:r>
-              <a:t>📈 台股 46,185（09/11 收盤，單日 -1.61%）→ 無系統風險，不恐慌不追高</a:t>
-            </a:r>
-          </a:p>
-          <a:p>
-            <a:pPr>
-              <a:spcAft>
-                <a:spcPts val="500"/>
-              </a:spcAft>
-              <a:defRPr sz="1500">
-                <a:solidFill>
-                  <a:srgbClr val="FFFFFF"/>
-                </a:solidFill>
-              </a:defRPr>
-            </a:pPr>
-          </a:p>
-          <a:p>
-            <a:pPr>
-              <a:spcAft>
-                <a:spcPts val="500"/>
-              </a:spcAft>
-              <a:defRPr sz="1500">
-                <a:solidFill>
-                  <a:srgbClr val="FFFFFF"/>
-                </a:solidFill>
-              </a:defRPr>
-            </a:pPr>
-            <a:r>
-              <a:t>🎯 9/6 核准框架：500 萬 MMF 標案預備金（不換匯不買債）→</a:t>
+              <a:t>📈 台股 45,511（09/15 收盤，單日 -0.77%）→ 無系統風險，不恐慌不追高</a:t>
+            </a:r>
+          </a:p>
+          <a:p>
+            <a:pPr>
+              <a:spcAft>
+                <a:spcPts val="500"/>
+              </a:spcAft>
+              <a:defRPr sz="1500">
+                <a:solidFill>
+                  <a:srgbClr val="FFFFFF"/>
+                </a:solidFill>
+              </a:defRPr>
+            </a:pPr>
+          </a:p>
+          <a:p>
+            <a:pPr>
+              <a:spcAft>
+                <a:spcPts val="500"/>
+              </a:spcAft>
+              <a:defRPr sz="1500">
+                <a:solidFill>
+                  <a:srgbClr val="FFFFFF"/>
+                </a:solidFill>
+              </a:defRPr>
+            </a:pPr>
+            <a:r>
+              <a:t>🎯 9/11／9/12 定案框架：整池質押 540 萬@2.77%（1,200 萬×4.5 成）→ 清償 500 萬高息負債；</a:t>
             </a:r>
           </a:p>
           <a:p>
@@ -3943,7 +3943,7 @@
               </a:defRPr>
             </a:pPr>
             <a:r>
-              <a:t>即時市場：台股 46,185（-1.61%）</a:t>
+              <a:t>即時市場：台股 45,511（-0.77%）</a:t>
             </a:r>
           </a:p>
         </p:txBody>
@@ -4016,7 +4016,7 @@
               </a:defRPr>
             </a:pPr>
             <a:r>
-              <a:t>📈 台股最新收盤 46,185（單日 -1.61%），asof 09/11</a:t>
+              <a:t>📈 台股最新收盤 45,511（單日 -0.77%），asof 09/15</a:t>
             </a:r>
           </a:p>
           <a:p>
@@ -4058,7 +4058,7 @@
               </a:defRPr>
             </a:pPr>
             <a:r>
-              <a:t>💵 USD/TWD 31.63 — 台幣偏強（較 7/29 高點 32.38 +2.3%）</a:t>
+              <a:t>💵 USD/TWD 31.82 — 台幣偏強（較 7/29 高點 32.38 +1.7%）</a:t>
             </a:r>
           </a:p>
           <a:p>
@@ -4100,7 +4100,7 @@
               </a:defRPr>
             </a:pPr>
             <a:r>
-              <a:t>📡 10yr 4.97% / 30yr 5.35% — 已達 5.30 凍結線，新增質押全域凍結</a:t>
+              <a:t>📡 10yr 5.00% / 30yr 5.38% — 已達 5.30 凍結線，新增質押全域凍結</a:t>
             </a:r>
           </a:p>
           <a:p>
@@ -4176,7 +4176,7 @@
               </a:defRPr>
             </a:pPr>
             <a:r>
-              <a:t>匯率 31.63 — 台幣偏強，美元曝險的雙面刃</a:t>
+              <a:t>匯率 31.82 — 台幣偏強，美元曝險的雙面刃</a:t>
             </a:r>
           </a:p>
         </p:txBody>
@@ -4211,7 +4211,7 @@
               </a:defRPr>
             </a:pPr>
             <a:r>
-              <a:t>美元曝險 64%（&gt;55% 監控線）→ 台幣升值 = 估值回吐風險</a:t>
+              <a:t>美元曝險 59%（&gt;55% 監控線）→ 台幣升值 = 估值回吐風險</a:t>
             </a:r>
           </a:p>
         </p:txBody>
@@ -4264,7 +4264,7 @@
               </a:defRPr>
             </a:pPr>
             <a:r>
-              <a:t>     7/29 高點 32.38 → 如今 31.63（台幣偏強 +2.3%）</a:t>
+              <a:t>     7/29 高點 32.38 → 如今 31.82（台幣偏強 +1.7%）</a:t>
             </a:r>
           </a:p>
           <a:p>
@@ -4306,22 +4306,22 @@
               </a:defRPr>
             </a:pPr>
             <a:r>
-              <a:t>💡 9/6 核准：500 萬 MMF（國泰貨基）= 10 月標案預備金</a:t>
-            </a:r>
-          </a:p>
-          <a:p>
-            <a:pPr>
-              <a:spcAft>
-                <a:spcPts val="500"/>
-              </a:spcAft>
-              <a:defRPr sz="1500">
-                <a:solidFill>
-                  <a:srgbClr val="FFFFFF"/>
-                </a:solidFill>
-              </a:defRPr>
-            </a:pPr>
-            <a:r>
-              <a:t>     不換匯、不買債 → 保留台幣流動性，當標案+升息雙重緩衝</a:t>
+              <a:t>💡 框架更新（9/11／9/12 定案）：原「500 萬 MMF＝10 月標案預備金」⛔ 已作廢</a:t>
+            </a:r>
+          </a:p>
+          <a:p>
+            <a:pPr>
+              <a:spcAft>
+                <a:spcPts val="500"/>
+              </a:spcAft>
+              <a:defRPr sz="1500">
+                <a:solidFill>
+                  <a:srgbClr val="FFFFFF"/>
+                </a:solidFill>
+              </a:defRPr>
+            </a:pPr>
+            <a:r>
+              <a:t>     MMF 已於 9/9 贖回、9/11 轉申購貝萊德 B11（質押擔保池）；10 月押標金 240 萬 來源延 9 月底評估</a:t>
             </a:r>
           </a:p>
           <a:p>
@@ -4501,7 +4501,7 @@
               </a:defRPr>
             </a:pPr>
             <a:r>
-              <a:t>證券總市值 2,948,510 元（snapshot 9/4）— 台股 8/24 裁示暫緩、9/6 全面觀望</a:t>
+              <a:t>證券總市值 2,922,190 元（snapshot 9/4）— 台股 8/24 裁示暫緩、9/6 全面觀望</a:t>
             </a:r>
           </a:p>
         </p:txBody>
@@ -4566,112 +4566,112 @@
               </a:defRPr>
             </a:pPr>
             <a:r>
-              <a:t>   0050        219,300  (+29.1%)  元大台灣50</a:t>
-            </a:r>
-          </a:p>
-          <a:p>
-            <a:pPr>
-              <a:spcAft>
-                <a:spcPts val="500"/>
-              </a:spcAft>
-              <a:defRPr sz="1500">
-                <a:solidFill>
-                  <a:srgbClr val="FFFFFF"/>
-                </a:solidFill>
-              </a:defRPr>
-            </a:pPr>
-            <a:r>
-              <a:t>   006208      500,100  (+27.0%)  富邦台50</a:t>
-            </a:r>
-          </a:p>
-          <a:p>
-            <a:pPr>
-              <a:spcAft>
-                <a:spcPts val="500"/>
-              </a:spcAft>
-              <a:defRPr sz="1500">
-                <a:solidFill>
-                  <a:srgbClr val="FFFFFF"/>
-                </a:solidFill>
-              </a:defRPr>
-            </a:pPr>
-            <a:r>
-              <a:t>   009816      257,920  (+29.1%)  凱基台灣TOP50</a:t>
-            </a:r>
-          </a:p>
-          <a:p>
-            <a:pPr>
-              <a:spcAft>
-                <a:spcPts val="500"/>
-              </a:spcAft>
-              <a:defRPr sz="1500">
-                <a:solidFill>
-                  <a:srgbClr val="FFFFFF"/>
-                </a:solidFill>
-              </a:defRPr>
-            </a:pPr>
-            <a:r>
-              <a:t>   00646        76,500  (+6.8%)  元大S&amp;P500</a:t>
-            </a:r>
-          </a:p>
-          <a:p>
-            <a:pPr>
-              <a:spcAft>
-                <a:spcPts val="500"/>
-              </a:spcAft>
-              <a:defRPr sz="1500">
-                <a:solidFill>
-                  <a:srgbClr val="FFFFFF"/>
-                </a:solidFill>
-              </a:defRPr>
-            </a:pPr>
-            <a:r>
-              <a:t>   00713       127,300  (+16.1%)  元大台灣高息低波</a:t>
-            </a:r>
-          </a:p>
-          <a:p>
-            <a:pPr>
-              <a:spcAft>
-                <a:spcPts val="500"/>
-              </a:spcAft>
-              <a:defRPr sz="1500">
-                <a:solidFill>
-                  <a:srgbClr val="FFFFFF"/>
-                </a:solidFill>
-              </a:defRPr>
-            </a:pPr>
-            <a:r>
-              <a:t>   00878       511,050  (+25.4%)  國泰永續高股息</a:t>
-            </a:r>
-          </a:p>
-          <a:p>
-            <a:pPr>
-              <a:spcAft>
-                <a:spcPts val="500"/>
-              </a:spcAft>
-              <a:defRPr sz="1500">
-                <a:solidFill>
-                  <a:srgbClr val="FFFFFF"/>
-                </a:solidFill>
-              </a:defRPr>
-            </a:pPr>
-            <a:r>
-              <a:t>   0056         55,750  (+50.1%)  元大高股息</a:t>
-            </a:r>
-          </a:p>
-          <a:p>
-            <a:pPr>
-              <a:spcAft>
-                <a:spcPts val="500"/>
-              </a:spcAft>
-              <a:defRPr sz="1500">
-                <a:solidFill>
-                  <a:srgbClr val="FFFFFF"/>
-                </a:solidFill>
-              </a:defRPr>
-            </a:pPr>
-            <a:r>
-              <a:t>   00981A      237,840  (+13.0%)  統一台灣高息動能</a:t>
+              <a:t>   0050        214,000  (+26.0%)  元大台灣50</a:t>
+            </a:r>
+          </a:p>
+          <a:p>
+            <a:pPr>
+              <a:spcAft>
+                <a:spcPts val="500"/>
+              </a:spcAft>
+              <a:defRPr sz="1500">
+                <a:solidFill>
+                  <a:srgbClr val="FFFFFF"/>
+                </a:solidFill>
+              </a:defRPr>
+            </a:pPr>
+            <a:r>
+              <a:t>   006208      489,600  (+24.3%)  富邦台50</a:t>
+            </a:r>
+          </a:p>
+          <a:p>
+            <a:pPr>
+              <a:spcAft>
+                <a:spcPts val="500"/>
+              </a:spcAft>
+              <a:defRPr sz="1500">
+                <a:solidFill>
+                  <a:srgbClr val="FFFFFF"/>
+                </a:solidFill>
+              </a:defRPr>
+            </a:pPr>
+            <a:r>
+              <a:t>   009816      253,760  (+27.0%)  凱基台灣TOP50</a:t>
+            </a:r>
+          </a:p>
+          <a:p>
+            <a:pPr>
+              <a:spcAft>
+                <a:spcPts val="500"/>
+              </a:spcAft>
+              <a:defRPr sz="1500">
+                <a:solidFill>
+                  <a:srgbClr val="FFFFFF"/>
+                </a:solidFill>
+              </a:defRPr>
+            </a:pPr>
+            <a:r>
+              <a:t>   00646        76,150  (+6.3%)  元大S&amp;P500</a:t>
+            </a:r>
+          </a:p>
+          <a:p>
+            <a:pPr>
+              <a:spcAft>
+                <a:spcPts val="500"/>
+              </a:spcAft>
+              <a:defRPr sz="1500">
+                <a:solidFill>
+                  <a:srgbClr val="FFFFFF"/>
+                </a:solidFill>
+              </a:defRPr>
+            </a:pPr>
+            <a:r>
+              <a:t>   00713       128,700  (+17.4%)  元大台灣高息低波</a:t>
+            </a:r>
+          </a:p>
+          <a:p>
+            <a:pPr>
+              <a:spcAft>
+                <a:spcPts val="500"/>
+              </a:spcAft>
+              <a:defRPr sz="1500">
+                <a:solidFill>
+                  <a:srgbClr val="FFFFFF"/>
+                </a:solidFill>
+              </a:defRPr>
+            </a:pPr>
+            <a:r>
+              <a:t>   00878       514,500  (+26.2%)  國泰永續高股息</a:t>
+            </a:r>
+          </a:p>
+          <a:p>
+            <a:pPr>
+              <a:spcAft>
+                <a:spcPts val="500"/>
+              </a:spcAft>
+              <a:defRPr sz="1500">
+                <a:solidFill>
+                  <a:srgbClr val="FFFFFF"/>
+                </a:solidFill>
+              </a:defRPr>
+            </a:pPr>
+            <a:r>
+              <a:t>   0056         55,500  (+49.4%)  元大高股息</a:t>
+            </a:r>
+          </a:p>
+          <a:p>
+            <a:pPr>
+              <a:spcAft>
+                <a:spcPts val="500"/>
+              </a:spcAft>
+              <a:defRPr sz="1500">
+                <a:solidFill>
+                  <a:srgbClr val="FFFFFF"/>
+                </a:solidFill>
+              </a:defRPr>
+            </a:pPr>
+            <a:r>
+              <a:t>   00981A      235,040  (+11.6%)  統一台灣高息動能</a:t>
             </a:r>
           </a:p>
           <a:p>
@@ -4866,7 +4866,7 @@
               </a:defRPr>
             </a:pPr>
             <a:r>
-              <a:t>基金總市值 12,618,497 元（snapshot 9/4 報價日 9/3）</a:t>
+              <a:t>基金總市值 12,628,144 元（snapshot 9/4 報價日 9/3）</a:t>
             </a:r>
           </a:p>
         </p:txBody>
@@ -4904,52 +4904,52 @@
               </a:defRPr>
             </a:pPr>
             <a:r>
-              <a:t>✅ 國泰直購（配息主力 + 標案預備金）：</a:t>
-            </a:r>
-          </a:p>
-          <a:p>
-            <a:pPr>
-              <a:spcAft>
-                <a:spcPts val="500"/>
-              </a:spcAft>
-              <a:defRPr sz="1500">
-                <a:solidFill>
-                  <a:srgbClr val="FFFFFF"/>
-                </a:solidFill>
-              </a:defRPr>
-            </a:pPr>
-            <a:r>
-              <a:t>     富達全球動能B月配美元 5,807,018 元 — 月配息主力</a:t>
-            </a:r>
-          </a:p>
-          <a:p>
-            <a:pPr>
-              <a:spcAft>
-                <a:spcPts val="500"/>
-              </a:spcAft>
-              <a:defRPr sz="1500">
-                <a:solidFill>
-                  <a:srgbClr val="FFFFFF"/>
-                </a:solidFill>
-              </a:defRPr>
-            </a:pPr>
-            <a:r>
-              <a:t>     國泰貨幣市場基金 0 元 = 500萬標案預備金（9/6 核准，不換匯不買債）</a:t>
-            </a:r>
-          </a:p>
-          <a:p>
-            <a:pPr>
-              <a:spcAft>
-                <a:spcPts val="500"/>
-              </a:spcAft>
-              <a:defRPr sz="1500">
-                <a:solidFill>
-                  <a:srgbClr val="FFFFFF"/>
-                </a:solidFill>
-              </a:defRPr>
-            </a:pPr>
-            <a:r>
-              <a:t>     聯博全球多元收益AD美元月配 966,581 元</a:t>
+              <a:t>✅ 國泰直購（配息主力 + 質押擔保池）：</a:t>
+            </a:r>
+          </a:p>
+          <a:p>
+            <a:pPr>
+              <a:spcAft>
+                <a:spcPts val="500"/>
+              </a:spcAft>
+              <a:defRPr sz="1500">
+                <a:solidFill>
+                  <a:srgbClr val="FFFFFF"/>
+                </a:solidFill>
+              </a:defRPr>
+            </a:pPr>
+            <a:r>
+              <a:t>     富達全球動能B月配美元 5,853,439 元 — 月配息主力</a:t>
+            </a:r>
+          </a:p>
+          <a:p>
+            <a:pPr>
+              <a:spcAft>
+                <a:spcPts val="500"/>
+              </a:spcAft>
+              <a:defRPr sz="1500">
+                <a:solidFill>
+                  <a:srgbClr val="FFFFFF"/>
+                </a:solidFill>
+              </a:defRPr>
+            </a:pPr>
+            <a:r>
+              <a:t>     貝萊德B11 強化穩定月配息 4,981,060 元（原 MMF 500 萬贖回款轉申購；⛔ 原「500萬標案預備金」已作廢 9/11）</a:t>
+            </a:r>
+          </a:p>
+          <a:p>
+            <a:pPr>
+              <a:spcAft>
+                <a:spcPts val="500"/>
+              </a:spcAft>
+              <a:defRPr sz="1500">
+                <a:solidFill>
+                  <a:srgbClr val="FFFFFF"/>
+                </a:solidFill>
+              </a:defRPr>
+            </a:pPr>
+            <a:r>
+              <a:t>     聯博全球多元收益AD美元月配 971,483 元</a:t>
             </a:r>
           </a:p>
           <a:p>
@@ -5416,7 +5416,7 @@
               </a:defRPr>
             </a:pPr>
             <a:r>
-              <a:t>穿透：台股 7.6%｜美股 57.2%（科技15.4）｜防守配息 4.4%｜債券 23.6%｜現金 3.7%</a:t>
+              <a:t>穿透：台股 7.5%｜美股 40.6%（科技15.4）｜防守配息 17.4%｜債券 27.6%｜現金 3.4%</a:t>
             </a:r>
           </a:p>
         </p:txBody>
@@ -5454,37 +5454,37 @@
               </a:defRPr>
             </a:pPr>
             <a:r>
-              <a:t>🔴 現況（9/6 核准框架）：</a:t>
-            </a:r>
-          </a:p>
-          <a:p>
-            <a:pPr>
-              <a:spcAft>
-                <a:spcPts val="500"/>
-              </a:spcAft>
-              <a:defRPr sz="1500">
-                <a:solidFill>
-                  <a:srgbClr val="FFFFFF"/>
-                </a:solidFill>
-              </a:defRPr>
-            </a:pPr>
-            <a:r>
-              <a:t>     500 萬 MMF（國泰貨基）= 10 月標案預備金，不動</a:t>
-            </a:r>
-          </a:p>
-          <a:p>
-            <a:pPr>
-              <a:spcAft>
-                <a:spcPts val="500"/>
-              </a:spcAft>
-              <a:defRPr sz="1500">
-                <a:solidFill>
-                  <a:srgbClr val="FFFFFF"/>
-                </a:solidFill>
-              </a:defRPr>
-            </a:pPr>
-            <a:r>
-              <a:t>     台股穿透 7.6% → 偏低，但觀望期凍結新增</a:t>
+              <a:t>🔴 現況（9/11／9/12 定案）：</a:t>
+            </a:r>
+          </a:p>
+          <a:p>
+            <a:pPr>
+              <a:spcAft>
+                <a:spcPts val="500"/>
+              </a:spcAft>
+              <a:defRPr sz="1500">
+                <a:solidFill>
+                  <a:srgbClr val="FFFFFF"/>
+                </a:solidFill>
+              </a:defRPr>
+            </a:pPr>
+            <a:r>
+              <a:t>     貝萊德 B11 500 萬（原 MMF 贖回款）＝質押擔保池成員，不可動用；10 月押標金來源延 9 月底評估</a:t>
+            </a:r>
+          </a:p>
+          <a:p>
+            <a:pPr>
+              <a:spcAft>
+                <a:spcPts val="500"/>
+              </a:spcAft>
+              <a:defRPr sz="1500">
+                <a:solidFill>
+                  <a:srgbClr val="FFFFFF"/>
+                </a:solidFill>
+              </a:defRPr>
+            </a:pPr>
+            <a:r>
+              <a:t>     台股穿透 7.5% → 偏低，但觀望期凍結新增</a:t>
             </a:r>
           </a:p>
           <a:p>
@@ -5595,7 +5595,7 @@
               </a:defRPr>
             </a:pPr>
             <a:r>
-              <a:t>📊 現金/安全網穿透 3.7%：底線 70 萬已守住</a:t>
+              <a:t>📊 現金/安全網穿透 3.4%：底線 70 萬已守住</a:t>
             </a:r>
           </a:p>
           <a:p>
@@ -5744,7 +5744,7 @@
               </a:defRPr>
             </a:pPr>
             <a:r>
-              <a:t>🔴 情境A：升息（30yr 5.35% 警戒區，CPI 9/11 關鍵）</a:t>
+              <a:t>🔴 情境A：升息（30yr 5.38% 警戒區，CPI 9/11 關鍵）</a:t>
             </a:r>
           </a:p>
           <a:p>
@@ -6019,7 +6019,7 @@
               </a:defRPr>
             </a:pPr>
             <a:r>
-              <a:t>📅 9/11：申購貝萊德B11 500萬（未質押）→ 過戶後整池質押 540 萬@2.77%（撥款 ~9/25）還安聯 300 + 餘240萬押標金</a:t>
+              <a:t>📅 質押：🔍 質押：擔保池 1,200萬（富達600＋聯博100＋貝萊德B11 500）×4.5成 = 540萬@2.77%；尚未撥款（對保完成後約 2 週，預估 2026-09-25） → 用途：優先清償 500萬高息負債（保單質押 400萬@4.0% ＋ 券商質押 100萬@3.92%）— 月息 16,600 → 12,465，月省約 4,135（2026-09-12 裁示；10月標案押標金不預留，9月底評估）</a:t>
             </a:r>
           </a:p>
           <a:p>

--- a/大轉向資產配置策略_final.pptx
+++ b/大轉向資產配置策略_final.pptx
@@ -3171,7 +3171,7 @@
               </a:defRPr>
             </a:pPr>
             <a:r>
-              <a:t>USD/TWD 31.82  ×  台股 45,511（09/15 收盤）  ×  10yr 5.00%</a:t>
+              <a:t>USD/TWD 31.83  ×  台股 45,511（09/15 收盤）  ×  10yr 5.01%</a:t>
             </a:r>
           </a:p>
         </p:txBody>
@@ -3484,7 +3484,7 @@
               </a:defRPr>
             </a:pPr>
             <a:r>
-              <a:t>      升息確定 → 500 萬 MMF 轉還債安全墊（不換匯不買債）</a:t>
+              <a:t>      升息確定 → ⛔ 原「500 萬 MMF 轉還債安全墊」已作廢（MMF 已轉 B11）；現行＝整池質押 540 萬@2.77% 清償 500 萬高息負債</a:t>
             </a:r>
           </a:p>
           <a:p>
@@ -3568,7 +3568,7 @@
               </a:defRPr>
             </a:pPr>
             <a:r>
-              <a:t>5️⃣ 【建明】10 月 → 標案結果出爐（500 萬 MMF 預備金已就位）</a:t>
+              <a:t>5️⃣ 【建明】10 月 → 標案結果出爐（⚠️ 押標金 240 萬來源延 9 月底評估；原記「500 萬 MMF 預備金已就位」⛔ 已作廢）</a:t>
             </a:r>
           </a:p>
           <a:p>
@@ -3744,7 +3744,7 @@
               </a:defRPr>
             </a:pPr>
             <a:r>
-              <a:t>💰 匯率 31.82：台幣偏強 → 不再加碼美元曝險，等 10 月重評估</a:t>
+              <a:t>💰 匯率 31.83：台幣偏強 → 不再加碼美元曝險，等 10 月重評估</a:t>
             </a:r>
           </a:p>
           <a:p>
@@ -4058,7 +4058,7 @@
               </a:defRPr>
             </a:pPr>
             <a:r>
-              <a:t>💵 USD/TWD 31.82 — 台幣偏強（較 7/29 高點 32.38 +1.7%）</a:t>
+              <a:t>💵 USD/TWD 31.83 — 台幣偏強（較 7/29 高點 32.38 +1.7%）</a:t>
             </a:r>
           </a:p>
           <a:p>
@@ -4100,7 +4100,7 @@
               </a:defRPr>
             </a:pPr>
             <a:r>
-              <a:t>📡 10yr 5.00% / 30yr 5.38% — 已達 5.30 凍結線，新增質押全域凍結</a:t>
+              <a:t>📡 10yr 5.01% / 30yr 5.38% — 已達 5.30 凍結線，新增質押全域凍結</a:t>
             </a:r>
           </a:p>
           <a:p>
@@ -4176,7 +4176,7 @@
               </a:defRPr>
             </a:pPr>
             <a:r>
-              <a:t>匯率 31.82 — 台幣偏強，美元曝險的雙面刃</a:t>
+              <a:t>匯率 31.83 — 台幣偏強，美元曝險的雙面刃</a:t>
             </a:r>
           </a:p>
         </p:txBody>
@@ -4264,7 +4264,7 @@
               </a:defRPr>
             </a:pPr>
             <a:r>
-              <a:t>     7/29 高點 32.38 → 如今 31.82（台幣偏強 +1.7%）</a:t>
+              <a:t>     7/29 高點 32.38 → 如今 31.83（台幣偏強 +1.7%）</a:t>
             </a:r>
           </a:p>
           <a:p>
@@ -5553,7 +5553,7 @@
               </a:defRPr>
             </a:pPr>
             <a:r>
-              <a:t>     升息確定 → 500 萬 MMF 轉還債安全墊（不換匯）</a:t>
+              <a:t>     升息確定 → ⛔ 原「500 萬 MMF 轉還債安全墊」已作廢（MMF 已轉 B11）→ 改由整池質押 540 萬（~9/25 撥款）清償高息負債</a:t>
             </a:r>
           </a:p>
           <a:p>
@@ -5759,7 +5759,7 @@
               </a:defRPr>
             </a:pPr>
             <a:r>
-              <a:t>     500 萬 MMF 緩衝 ✅ 00983D 短債抗跌 ✅ 質押新增凍結（≥5.30 線）✅</a:t>
+              <a:t>     質押擔保池 B11 500 萬（原 MMF）✅ 00983D 短債抗跌 ✅ 質押新增凍結（≥5.30 線）✅</a:t>
             </a:r>
           </a:p>
           <a:p>
@@ -6061,7 +6061,7 @@
               </a:defRPr>
             </a:pPr>
             <a:r>
-              <a:t>     升息確定 → 500 萬 MMF 轉還債安全墊（不換匯不買債）</a:t>
+              <a:t>     升息確定 → ⛔ 原「500 萬 MMF 轉還債安全墊（不換匯不買債）」已作廢；現行＝整池質押 540 萬@2.77% 清償 500 萬高息負債</a:t>
             </a:r>
           </a:p>
           <a:p>
@@ -6145,7 +6145,7 @@
               </a:defRPr>
             </a:pPr>
             <a:r>
-              <a:t>     標到 → 履約保證函優先，500 萬 MMF 作為營運預備金</a:t>
+              <a:t>     標到 → 履約保證函優先；⛔ 原「500 萬 MMF 作為營運預備金」已作廢（押標金來源延 9 月底評估）</a:t>
             </a:r>
           </a:p>
           <a:p>
